--- a/산출물/실전반/이론_오프라인/01회차/실전반_오프라인_01회차.pptx
+++ b/산출물/실전반/이론_오프라인/01회차/실전반_오프라인_01회차.pptx
@@ -549,11 +549,6 @@
           </a:p>
           <a:p>
             <a:r>
-              <a:t>· 이론은 온라인 1회차와 같은 교재의 장에서 오늘 실습에 필요한 핵심만 골라 잇는다</a:t>
-            </a:r>
-          </a:p>
-          <a:p>
-            <a:r>
               <a:t>· 줄기: 완성 흐름 → 시스템 구조 → 지식이 필요한 이유 → 그래프로 다루는 말 → 포털과 과정의 길</a:t>
             </a:r>
           </a:p>
@@ -1144,7 +1139,7 @@
           </a:p>
           <a:p>
             <a:r>
-              <a:t>· 이 단원 끝에서 관계를 문장으로 읽는 법 → 관계도 실습으로 이어진다</a:t>
+              <a:t>· 이 단원 끝에서 관계를 화살표마다 문장으로 읽는다</a:t>
             </a:r>
           </a:p>
           <a:p>
@@ -1639,12 +1634,12 @@
           </a:p>
           <a:p>
             <a:r>
-              <a:t>· 3 지식과 관계: 경보 값만으로 원인을 못 가린다 → 관계로 적은 지식, 그 관계를 그래프와 Cypher로 다룬다(이어지는 실습)</a:t>
-            </a:r>
-          </a:p>
-          <a:p>
-            <a:r>
-              <a:t>· 4 포털과 과정의 길: 시연에서 열 네 화면, 그리고 과정 전체가 어디로 가는지</a:t>
+              <a:t>· 3 지식과 관계: 경보 값만으로 원인을 못 가린다 → 관계로 적은 지식, 그 관계를 그래프와 Cypher로 다룬다</a:t>
+            </a:r>
+          </a:p>
+          <a:p>
+            <a:r>
+              <a:t>· 4 포털과 과정의 길: 포털 네 화면이 맡는 역할, 그리고 과정 전체가 어디로 가는지</a:t>
             </a:r>
           </a:p>
           <a:p>
@@ -2139,7 +2134,7 @@
           </a:p>
           <a:p>
             <a:r>
-              <a:t>· 실습에서는 별도 Neo4j 랩 DB에서 직접 만들고 찾고 고치고 지운다 → 여기서는 읽는 법만</a:t>
+              <a:t>· 클래스 = 공통 특성을 가진 대상의 유형, 인스턴스 = 그 유형에 속하는 실제 개별 대상 → 그래프 DB에서 인스턴스 하나는 노드 하나, 클래스 이름은 레이블</a:t>
             </a:r>
           </a:p>
           <a:p>
@@ -2519,7 +2514,7 @@
           </a:p>
           <a:p>
             <a:r>
-              <a:t>· 포털 시연에서 무엇을 어디서 볼지 미리 정해 둔다</a:t>
+              <a:t>· 포털의 네 화면이 각각 어떤 물음에 답하는지</a:t>
             </a:r>
           </a:p>
           <a:p>
@@ -2624,7 +2619,7 @@
           </a:p>
           <a:p>
             <a:r>
-              <a:t>· 시연 순서: 경보는 설비 화면 → 추천과 근거는 에이전트 · 지식 지도 → 승인은 작업함 → 결과는 다시 설비 화면</a:t>
+              <a:t>· 쿨러 사건의 순서로 읽으면: 경보는 설비 화면 → 추천과 근거는 에이전트 · 지식 지도 → 승인은 작업함 → 결과는 다시 설비 화면</a:t>
             </a:r>
           </a:p>
           <a:p>
@@ -2719,12 +2714,12 @@
           </a:p>
           <a:p>
             <a:r>
-              <a:t>· 04 관계를 저장하고 찾는 말(노드 · 레이블 · Cypher) — Cypher 실습의 바탕</a:t>
-            </a:r>
-          </a:p>
-          <a:p>
-            <a:r>
-              <a:t>· 05 시연에서 열 포털 화면과 과정 전체의 길, 오늘 실습</a:t>
+              <a:t>· 04 관계를 저장하고 찾는 말(노드 · 레이블 · Cypher)</a:t>
+            </a:r>
+          </a:p>
+          <a:p>
+            <a:r>
+              <a:t>· 05 포털 네 화면의 역할과 과정 전체의 길</a:t>
             </a:r>
           </a:p>
           <a:p>
@@ -3024,6 +3019,11 @@
           </a:p>
           <a:p>
             <a:r>
+              <a:t>· 이 기록을 Cypher로 조회할 때도 같은 구별: 값만 돌려받으면 한 행 = 연결 하나라 같은 사건이 여러 행에 되풀이될 수 있다 → 기록이 한 사건에 제대로 이어졌는지는 노드 · 관계를 돌려받아 그림으로 확인</a:t>
+            </a:r>
+          </a:p>
+          <a:p>
+            <a:r>
               <a:t>[다음] 오늘 다룬 핵심 개념과 주요 용어 정리</a:t>
             </a:r>
           </a:p>
@@ -3094,7 +3094,7 @@
           <a:lstStyle/>
           <a:p>
             <a:r>
-              <a:t>[짚을 곳] 표 여덟 줄을 위에서부터, 정식 명칭은 화면에 맡기고 뜻만</a:t>
+              <a:t>[짚을 곳] 표 아홉 줄을 위에서부터, 정식 명칭은 화면에 맡기고 뜻만</a:t>
             </a:r>
           </a:p>
           <a:p>
@@ -3110,6 +3110,11 @@
           <a:p>
             <a:r>
               <a:t>· HITL = 자동 처리 중간에 사람이 승인 · 거절로 결정, MES = 생산 지시 · 실적 · 납기를 관리</a:t>
+            </a:r>
+          </a:p>
+          <a:p>
+            <a:r>
+              <a:t>· 클래스 = 같은 정의를 따르는 대상의 유형, 인스턴스 = 그 유형의 실제 대상 하나</a:t>
             </a:r>
           </a:p>
           <a:p>
@@ -3679,6 +3684,11 @@
           </a:p>
           <a:p>
             <a:r>
+              <a:t>· HYD = 유압 설비와 업무 시스템을 연결한 수업용 시스템</a:t>
+            </a:r>
+          </a:p>
+          <a:p>
+            <a:r>
               <a:t>· 부분부터 배우면 왜 필요한지 놓친다 → 완성된 흐름을 먼저</a:t>
             </a:r>
           </a:p>
@@ -3764,7 +3774,7 @@
           </a:p>
           <a:p>
             <a:r>
-              <a:t>· 교재에 보관한 사건 기록이다. 단계는 실습과 비교하되 시각 · 수치는 이 기록 값으로 읽는다</a:t>
+              <a:t>· 교재에 보관한 사건 기록이다. 시각 · 수치는 이 기록 값으로 읽는다</a:t>
             </a:r>
           </a:p>
           <a:p>
@@ -12209,7 +12219,7 @@
       </p:sp>
       <p:pic>
         <p:nvPicPr>
-          <p:cNvPr id="6" name="삽화:계층_0_전체.svg" descr="illust_2914541498303766711_1793113376.png"/>
+          <p:cNvPr id="6" name="삽화:계층_0_전체.svg" descr="illust_4349741925728443627_1793113376.png"/>
           <p:cNvPicPr>
             <a:picLocks noChangeAspect="1"/>
           </p:cNvPicPr>
@@ -16165,7 +16175,7 @@
       </p:sp>
       <p:pic>
         <p:nvPicPr>
-          <p:cNvPr id="6" name="삽화:흩어진정보.svg" descr="illust_6232024466461317444_1793113376.png"/>
+          <p:cNvPr id="6" name="삽화:흩어진정보.svg" descr="illust_3007293785439885202_1793113376.png"/>
           <p:cNvPicPr>
             <a:picLocks noChangeAspect="1"/>
           </p:cNvPicPr>
@@ -19701,7 +19711,7 @@
       </p:sp>
       <p:pic>
         <p:nvPicPr>
-          <p:cNvPr id="6" name="Picture 5" descr="illust_6887745059284865566_1793113376.png"/>
+          <p:cNvPr id="6" name="Picture 5" descr="illust_2370446313626974241_1793113376.png"/>
           <p:cNvPicPr>
             <a:picLocks noChangeAspect="1"/>
           </p:cNvPicPr>
@@ -20317,7 +20327,7 @@
       </p:sp>
       <p:pic>
         <p:nvPicPr>
-          <p:cNvPr id="6" name="삽화:지식그래프_지도.svg" descr="illust_1855889735583173499_1793113376.png"/>
+          <p:cNvPr id="6" name="삽화:지식그래프_지도.svg" descr="illust_5815621034441356411_1793113376.png"/>
           <p:cNvPicPr>
             <a:picLocks noChangeAspect="1"/>
           </p:cNvPicPr>
@@ -25530,7 +25540,7 @@
                 <a:ea typeface="맑은 고딕"/>
                 <a:cs typeface="맑은 고딕"/>
               </a:rPr>
-              <a:t>시연에서 열 네 화면과, 관계 모델에서 업무 흐름까지 가는 길</a:t>
+              <a:t>포털 네 화면의 역할과 과정 전체의 길</a:t>
             </a:r>
           </a:p>
         </p:txBody>
@@ -30481,7 +30491,7 @@
         </p:nvSpPr>
         <p:spPr>
           <a:xfrm>
-            <a:off x="548640" y="1627632"/>
+            <a:off x="548640" y="1627631"/>
             <a:ext cx="11094415" cy="347472"/>
           </a:xfrm>
           <a:prstGeom prst="roundRect">
@@ -30512,7 +30522,7 @@
         </p:nvSpPr>
         <p:spPr>
           <a:xfrm>
-            <a:off x="685800" y="1627632"/>
+            <a:off x="685800" y="1627631"/>
             <a:ext cx="2514600" cy="347472"/>
           </a:xfrm>
           <a:prstGeom prst="rect">
@@ -30551,7 +30561,7 @@
         </p:nvSpPr>
         <p:spPr>
           <a:xfrm>
-            <a:off x="3200400" y="1627632"/>
+            <a:off x="3200400" y="1627631"/>
             <a:ext cx="8442655" cy="347472"/>
           </a:xfrm>
           <a:prstGeom prst="rect">
@@ -30591,7 +30601,7 @@
         <p:spPr>
           <a:xfrm>
             <a:off x="548640" y="2061972"/>
-            <a:ext cx="11094415" cy="476631"/>
+            <a:ext cx="11094415" cy="416560"/>
           </a:xfrm>
           <a:prstGeom prst="roundRect">
             <a:avLst>
@@ -30621,8 +30631,8 @@
         </p:nvSpPr>
         <p:spPr>
           <a:xfrm>
-            <a:off x="685800" y="2029968"/>
-            <a:ext cx="2514600" cy="540639"/>
+            <a:off x="685800" y="2029967"/>
+            <a:ext cx="2514600" cy="480568"/>
           </a:xfrm>
           <a:prstGeom prst="rect">
             <a:avLst/>
@@ -30660,8 +30670,8 @@
         </p:nvSpPr>
         <p:spPr>
           <a:xfrm>
-            <a:off x="3200400" y="2029968"/>
-            <a:ext cx="8351215" cy="540639"/>
+            <a:off x="3200400" y="2029967"/>
+            <a:ext cx="8351215" cy="480568"/>
           </a:xfrm>
           <a:prstGeom prst="rect">
             <a:avLst/>
@@ -30678,7 +30688,7 @@
               </a:lnSpc>
             </a:pPr>
             <a:r>
-              <a:rPr sz="1400" b="0">
+              <a:rPr sz="1250" b="0">
                 <a:solidFill>
                   <a:srgbClr val="1F2A3A"/>
                 </a:solidFill>
@@ -30696,7 +30706,7 @@
               </a:lnSpc>
             </a:pPr>
             <a:r>
-              <a:rPr sz="1400" b="0">
+              <a:rPr sz="1250" b="0">
                 <a:solidFill>
                   <a:srgbClr val="1F2A3A"/>
                 </a:solidFill>
@@ -30717,8 +30727,8 @@
         </p:nvSpPr>
         <p:spPr>
           <a:xfrm>
-            <a:off x="548640" y="2602611"/>
-            <a:ext cx="11094415" cy="476631"/>
+            <a:off x="548640" y="2542540"/>
+            <a:ext cx="11094415" cy="416560"/>
           </a:xfrm>
           <a:prstGeom prst="roundRect">
             <a:avLst>
@@ -30748,8 +30758,8 @@
         </p:nvSpPr>
         <p:spPr>
           <a:xfrm>
-            <a:off x="685800" y="2570607"/>
-            <a:ext cx="2514600" cy="540639"/>
+            <a:off x="685800" y="2510536"/>
+            <a:ext cx="2514600" cy="480568"/>
           </a:xfrm>
           <a:prstGeom prst="rect">
             <a:avLst/>
@@ -30787,8 +30797,8 @@
         </p:nvSpPr>
         <p:spPr>
           <a:xfrm>
-            <a:off x="3200400" y="2570607"/>
-            <a:ext cx="8351215" cy="540639"/>
+            <a:off x="3200400" y="2510536"/>
+            <a:ext cx="8351215" cy="480568"/>
           </a:xfrm>
           <a:prstGeom prst="rect">
             <a:avLst/>
@@ -30805,7 +30815,7 @@
               </a:lnSpc>
             </a:pPr>
             <a:r>
-              <a:rPr sz="1400" b="0">
+              <a:rPr sz="1250" b="0">
                 <a:solidFill>
                   <a:srgbClr val="1F2A3A"/>
                 </a:solidFill>
@@ -30823,7 +30833,7 @@
               </a:lnSpc>
             </a:pPr>
             <a:r>
-              <a:rPr sz="1400" b="0">
+              <a:rPr sz="1250" b="0">
                 <a:solidFill>
                   <a:srgbClr val="1F2A3A"/>
                 </a:solidFill>
@@ -30844,8 +30854,8 @@
         </p:nvSpPr>
         <p:spPr>
           <a:xfrm>
-            <a:off x="548640" y="3143250"/>
-            <a:ext cx="11094415" cy="476631"/>
+            <a:off x="548640" y="3023108"/>
+            <a:ext cx="11094415" cy="416560"/>
           </a:xfrm>
           <a:prstGeom prst="roundRect">
             <a:avLst>
@@ -30875,8 +30885,8 @@
         </p:nvSpPr>
         <p:spPr>
           <a:xfrm>
-            <a:off x="685800" y="3111246"/>
-            <a:ext cx="2514600" cy="540639"/>
+            <a:off x="685800" y="2991104"/>
+            <a:ext cx="2514600" cy="480568"/>
           </a:xfrm>
           <a:prstGeom prst="rect">
             <a:avLst/>
@@ -30914,8 +30924,8 @@
         </p:nvSpPr>
         <p:spPr>
           <a:xfrm>
-            <a:off x="3200400" y="3111246"/>
-            <a:ext cx="8351215" cy="540639"/>
+            <a:off x="3200400" y="2991104"/>
+            <a:ext cx="8351215" cy="480568"/>
           </a:xfrm>
           <a:prstGeom prst="rect">
             <a:avLst/>
@@ -30932,7 +30942,7 @@
               </a:lnSpc>
             </a:pPr>
             <a:r>
-              <a:rPr sz="1400" b="0">
+              <a:rPr sz="1250" b="0">
                 <a:solidFill>
                   <a:srgbClr val="1F2A3A"/>
                 </a:solidFill>
@@ -30950,7 +30960,7 @@
               </a:lnSpc>
             </a:pPr>
             <a:r>
-              <a:rPr sz="1400" b="0">
+              <a:rPr sz="1250" b="0">
                 <a:solidFill>
                   <a:srgbClr val="1F2A3A"/>
                 </a:solidFill>
@@ -30971,8 +30981,8 @@
         </p:nvSpPr>
         <p:spPr>
           <a:xfrm>
-            <a:off x="548640" y="3683888"/>
-            <a:ext cx="11094415" cy="476631"/>
+            <a:off x="548640" y="3503676"/>
+            <a:ext cx="11094415" cy="416560"/>
           </a:xfrm>
           <a:prstGeom prst="roundRect">
             <a:avLst>
@@ -31002,8 +31012,8 @@
         </p:nvSpPr>
         <p:spPr>
           <a:xfrm>
-            <a:off x="685800" y="3651885"/>
-            <a:ext cx="2514600" cy="540639"/>
+            <a:off x="685800" y="3471672"/>
+            <a:ext cx="2514600" cy="480568"/>
           </a:xfrm>
           <a:prstGeom prst="rect">
             <a:avLst/>
@@ -31041,8 +31051,8 @@
         </p:nvSpPr>
         <p:spPr>
           <a:xfrm>
-            <a:off x="3200400" y="3651885"/>
-            <a:ext cx="8351215" cy="540639"/>
+            <a:off x="3200400" y="3471672"/>
+            <a:ext cx="8351215" cy="480568"/>
           </a:xfrm>
           <a:prstGeom prst="rect">
             <a:avLst/>
@@ -31059,7 +31069,7 @@
               </a:lnSpc>
             </a:pPr>
             <a:r>
-              <a:rPr sz="1400" b="0">
+              <a:rPr sz="1250" b="0">
                 <a:solidFill>
                   <a:srgbClr val="1F2A3A"/>
                 </a:solidFill>
@@ -31077,7 +31087,7 @@
               </a:lnSpc>
             </a:pPr>
             <a:r>
-              <a:rPr sz="1400" b="0">
+              <a:rPr sz="1250" b="0">
                 <a:solidFill>
                   <a:srgbClr val="1F2A3A"/>
                 </a:solidFill>
@@ -31098,8 +31108,8 @@
         </p:nvSpPr>
         <p:spPr>
           <a:xfrm>
-            <a:off x="548640" y="4224528"/>
-            <a:ext cx="11094415" cy="476631"/>
+            <a:off x="548640" y="3984244"/>
+            <a:ext cx="11094415" cy="416560"/>
           </a:xfrm>
           <a:prstGeom prst="roundRect">
             <a:avLst>
@@ -31129,8 +31139,8 @@
         </p:nvSpPr>
         <p:spPr>
           <a:xfrm>
-            <a:off x="685800" y="4192524"/>
-            <a:ext cx="2514600" cy="540639"/>
+            <a:off x="685800" y="3952239"/>
+            <a:ext cx="2514600" cy="480568"/>
           </a:xfrm>
           <a:prstGeom prst="rect">
             <a:avLst/>
@@ -31168,8 +31178,8 @@
         </p:nvSpPr>
         <p:spPr>
           <a:xfrm>
-            <a:off x="3200400" y="4192524"/>
-            <a:ext cx="8351215" cy="540639"/>
+            <a:off x="3200400" y="3952239"/>
+            <a:ext cx="8351215" cy="480568"/>
           </a:xfrm>
           <a:prstGeom prst="rect">
             <a:avLst/>
@@ -31186,7 +31196,7 @@
               </a:lnSpc>
             </a:pPr>
             <a:r>
-              <a:rPr sz="1400" b="0">
+              <a:rPr sz="1250" b="0">
                 <a:solidFill>
                   <a:srgbClr val="1F2A3A"/>
                 </a:solidFill>
@@ -31204,7 +31214,7 @@
               </a:lnSpc>
             </a:pPr>
             <a:r>
-              <a:rPr sz="1400" b="0">
+              <a:rPr sz="1250" b="0">
                 <a:solidFill>
                   <a:srgbClr val="1F2A3A"/>
                 </a:solidFill>
@@ -31225,8 +31235,8 @@
         </p:nvSpPr>
         <p:spPr>
           <a:xfrm>
-            <a:off x="548640" y="4765167"/>
-            <a:ext cx="11094415" cy="476631"/>
+            <a:off x="548640" y="4464811"/>
+            <a:ext cx="11094415" cy="416560"/>
           </a:xfrm>
           <a:prstGeom prst="roundRect">
             <a:avLst>
@@ -31256,8 +31266,8 @@
         </p:nvSpPr>
         <p:spPr>
           <a:xfrm>
-            <a:off x="685800" y="4733163"/>
-            <a:ext cx="2514600" cy="540639"/>
+            <a:off x="685800" y="4432807"/>
+            <a:ext cx="2514600" cy="480568"/>
           </a:xfrm>
           <a:prstGeom prst="rect">
             <a:avLst/>
@@ -31295,8 +31305,8 @@
         </p:nvSpPr>
         <p:spPr>
           <a:xfrm>
-            <a:off x="3200400" y="4733163"/>
-            <a:ext cx="8351215" cy="540639"/>
+            <a:off x="3200400" y="4432807"/>
+            <a:ext cx="8351215" cy="480568"/>
           </a:xfrm>
           <a:prstGeom prst="rect">
             <a:avLst/>
@@ -31313,7 +31323,7 @@
               </a:lnSpc>
             </a:pPr>
             <a:r>
-              <a:rPr sz="1400" b="0">
+              <a:rPr sz="1250" b="0">
                 <a:solidFill>
                   <a:srgbClr val="1F2A3A"/>
                 </a:solidFill>
@@ -31331,7 +31341,7 @@
               </a:lnSpc>
             </a:pPr>
             <a:r>
-              <a:rPr sz="1400" b="0">
+              <a:rPr sz="1250" b="0">
                 <a:solidFill>
                   <a:srgbClr val="1F2A3A"/>
                 </a:solidFill>
@@ -31352,8 +31362,8 @@
         </p:nvSpPr>
         <p:spPr>
           <a:xfrm>
-            <a:off x="548640" y="5305806"/>
-            <a:ext cx="11094415" cy="476631"/>
+            <a:off x="548640" y="4945380"/>
+            <a:ext cx="11094415" cy="416560"/>
           </a:xfrm>
           <a:prstGeom prst="roundRect">
             <a:avLst>
@@ -31383,8 +31393,8 @@
         </p:nvSpPr>
         <p:spPr>
           <a:xfrm>
-            <a:off x="685800" y="5273802"/>
-            <a:ext cx="2514600" cy="540639"/>
+            <a:off x="685800" y="4913376"/>
+            <a:ext cx="2514600" cy="480568"/>
           </a:xfrm>
           <a:prstGeom prst="rect">
             <a:avLst/>
@@ -31409,7 +31419,7 @@
                 <a:ea typeface="맑은 고딕"/>
                 <a:cs typeface="맑은 고딕"/>
               </a:rPr>
-              <a:t>레이블</a:t>
+              <a:t>클래스 · 인스턴스</a:t>
             </a:r>
           </a:p>
         </p:txBody>
@@ -31422,8 +31432,8 @@
         </p:nvSpPr>
         <p:spPr>
           <a:xfrm>
-            <a:off x="3200400" y="5273802"/>
-            <a:ext cx="8351215" cy="540639"/>
+            <a:off x="3200400" y="4913376"/>
+            <a:ext cx="8351215" cy="480568"/>
           </a:xfrm>
           <a:prstGeom prst="rect">
             <a:avLst/>
@@ -31440,7 +31450,7 @@
               </a:lnSpc>
             </a:pPr>
             <a:r>
-              <a:rPr sz="1400" b="0">
+              <a:rPr sz="1250" b="0">
                 <a:solidFill>
                   <a:srgbClr val="1F2A3A"/>
                 </a:solidFill>
@@ -31448,17 +31458,17 @@
                 <a:ea typeface="맑은 고딕"/>
                 <a:cs typeface="맑은 고딕"/>
               </a:rPr>
-              <a:t>Label</a:t>
-            </a:r>
-          </a:p>
-          <a:p>
-            <a:pPr algn="l" eaLnBrk="0">
-              <a:lnSpc>
-                <a:spcPct val="110000"/>
-              </a:lnSpc>
-            </a:pPr>
-            <a:r>
-              <a:rPr sz="1400" b="0">
+              <a:t>Class · Instance</a:t>
+            </a:r>
+          </a:p>
+          <a:p>
+            <a:pPr algn="l" eaLnBrk="0">
+              <a:lnSpc>
+                <a:spcPct val="110000"/>
+              </a:lnSpc>
+            </a:pPr>
+            <a:r>
+              <a:rPr sz="1250" b="0">
                 <a:solidFill>
                   <a:srgbClr val="1F2A3A"/>
                 </a:solidFill>
@@ -31466,7 +31476,7 @@
                 <a:ea typeface="맑은 고딕"/>
                 <a:cs typeface="맑은 고딕"/>
               </a:rPr>
-              <a:t>그래프 DB에서 노드의 종류를 나타내는 이름</a:t>
+              <a:t>같은 정의를 따르는 대상의 유형과, 그 유형에 속하는 실제 대상 하나</a:t>
             </a:r>
           </a:p>
         </p:txBody>
@@ -31479,8 +31489,8 @@
         </p:nvSpPr>
         <p:spPr>
           <a:xfrm>
-            <a:off x="548640" y="5846445"/>
-            <a:ext cx="11094415" cy="476631"/>
+            <a:off x="548640" y="5425948"/>
+            <a:ext cx="11094415" cy="416560"/>
           </a:xfrm>
           <a:prstGeom prst="roundRect">
             <a:avLst>
@@ -31510,8 +31520,8 @@
         </p:nvSpPr>
         <p:spPr>
           <a:xfrm>
-            <a:off x="685800" y="5814441"/>
-            <a:ext cx="2514600" cy="540639"/>
+            <a:off x="685800" y="5393944"/>
+            <a:ext cx="2514600" cy="480568"/>
           </a:xfrm>
           <a:prstGeom prst="rect">
             <a:avLst/>
@@ -31536,6 +31546,133 @@
                 <a:ea typeface="맑은 고딕"/>
                 <a:cs typeface="맑은 고딕"/>
               </a:rPr>
+              <a:t>레이블</a:t>
+            </a:r>
+          </a:p>
+        </p:txBody>
+      </p:sp>
+      <p:sp>
+        <p:nvSpPr>
+          <p:cNvPr id="32" name="TextBox 31"/>
+          <p:cNvSpPr txBox="1"/>
+          <p:nvPr/>
+        </p:nvSpPr>
+        <p:spPr>
+          <a:xfrm>
+            <a:off x="3200400" y="5393944"/>
+            <a:ext cx="8351215" cy="480568"/>
+          </a:xfrm>
+          <a:prstGeom prst="rect">
+            <a:avLst/>
+          </a:prstGeom>
+          <a:noFill/>
+        </p:spPr>
+        <p:txBody>
+          <a:bodyPr wrap="square" anchor="ctr"/>
+          <a:lstStyle/>
+          <a:p>
+            <a:pPr algn="l" eaLnBrk="0">
+              <a:lnSpc>
+                <a:spcPct val="110000"/>
+              </a:lnSpc>
+            </a:pPr>
+            <a:r>
+              <a:rPr sz="1250" b="0">
+                <a:solidFill>
+                  <a:srgbClr val="1F2A3A"/>
+                </a:solidFill>
+                <a:latin typeface="맑은 고딕"/>
+                <a:ea typeface="맑은 고딕"/>
+                <a:cs typeface="맑은 고딕"/>
+              </a:rPr>
+              <a:t>Label</a:t>
+            </a:r>
+          </a:p>
+          <a:p>
+            <a:pPr algn="l" eaLnBrk="0">
+              <a:lnSpc>
+                <a:spcPct val="110000"/>
+              </a:lnSpc>
+            </a:pPr>
+            <a:r>
+              <a:rPr sz="1250" b="0">
+                <a:solidFill>
+                  <a:srgbClr val="1F2A3A"/>
+                </a:solidFill>
+                <a:latin typeface="맑은 고딕"/>
+                <a:ea typeface="맑은 고딕"/>
+                <a:cs typeface="맑은 고딕"/>
+              </a:rPr>
+              <a:t>그래프 DB에서 노드의 종류를 나타내는 이름</a:t>
+            </a:r>
+          </a:p>
+        </p:txBody>
+      </p:sp>
+      <p:sp>
+        <p:nvSpPr>
+          <p:cNvPr id="33" name="Rounded Rectangle 32"/>
+          <p:cNvSpPr/>
+          <p:nvPr/>
+        </p:nvSpPr>
+        <p:spPr>
+          <a:xfrm>
+            <a:off x="548640" y="5906516"/>
+            <a:ext cx="11094415" cy="416560"/>
+          </a:xfrm>
+          <a:prstGeom prst="roundRect">
+            <a:avLst>
+              <a:gd name="adj" fmla="val 8000"/>
+            </a:avLst>
+          </a:prstGeom>
+          <a:solidFill>
+            <a:srgbClr val="F3F6F9"/>
+          </a:solidFill>
+          <a:ln>
+            <a:noFill/>
+          </a:ln>
+        </p:spPr>
+        <p:txBody>
+          <a:bodyPr rtlCol="0" anchor="ctr"/>
+          <a:lstStyle/>
+          <a:p>
+            <a:pPr algn="ctr"/>
+          </a:p>
+        </p:txBody>
+      </p:sp>
+      <p:sp>
+        <p:nvSpPr>
+          <p:cNvPr id="34" name="TextBox 33"/>
+          <p:cNvSpPr txBox="1"/>
+          <p:nvPr/>
+        </p:nvSpPr>
+        <p:spPr>
+          <a:xfrm>
+            <a:off x="685800" y="5874512"/>
+            <a:ext cx="2514600" cy="480568"/>
+          </a:xfrm>
+          <a:prstGeom prst="rect">
+            <a:avLst/>
+          </a:prstGeom>
+          <a:noFill/>
+        </p:spPr>
+        <p:txBody>
+          <a:bodyPr wrap="square" anchor="ctr"/>
+          <a:lstStyle/>
+          <a:p>
+            <a:pPr algn="l" eaLnBrk="0">
+              <a:lnSpc>
+                <a:spcPct val="110000"/>
+              </a:lnSpc>
+            </a:pPr>
+            <a:r>
+              <a:rPr sz="1450" b="1">
+                <a:solidFill>
+                  <a:srgbClr val="13294B"/>
+                </a:solidFill>
+                <a:latin typeface="맑은 고딕"/>
+                <a:ea typeface="맑은 고딕"/>
+                <a:cs typeface="맑은 고딕"/>
+              </a:rPr>
               <a:t>Cypher 쿼리</a:t>
             </a:r>
           </a:p>
@@ -31543,14 +31680,14 @@
       </p:sp>
       <p:sp>
         <p:nvSpPr>
-          <p:cNvPr id="32" name="TextBox 31"/>
-          <p:cNvSpPr txBox="1"/>
-          <p:nvPr/>
-        </p:nvSpPr>
-        <p:spPr>
-          <a:xfrm>
-            <a:off x="3200400" y="5814441"/>
-            <a:ext cx="8351215" cy="540639"/>
+          <p:cNvPr id="35" name="TextBox 34"/>
+          <p:cNvSpPr txBox="1"/>
+          <p:nvPr/>
+        </p:nvSpPr>
+        <p:spPr>
+          <a:xfrm>
+            <a:off x="3200400" y="5874512"/>
+            <a:ext cx="8351215" cy="480568"/>
           </a:xfrm>
           <a:prstGeom prst="rect">
             <a:avLst/>
@@ -31567,7 +31704,7 @@
               </a:lnSpc>
             </a:pPr>
             <a:r>
-              <a:rPr sz="1400" b="0">
+              <a:rPr sz="1250" b="0">
                 <a:solidFill>
                   <a:srgbClr val="1F2A3A"/>
                 </a:solidFill>
@@ -31585,7 +31722,7 @@
               </a:lnSpc>
             </a:pPr>
             <a:r>
-              <a:rPr sz="1400" b="0">
+              <a:rPr sz="1250" b="0">
                 <a:solidFill>
                   <a:srgbClr val="1F2A3A"/>
                 </a:solidFill>
@@ -37257,7 +37394,7 @@
       </p:sp>
       <p:pic>
         <p:nvPicPr>
-          <p:cNvPr id="6" name="삽화:설비_유압파워팩.svg" descr="illust_8852760371110697380_1793113376.png"/>
+          <p:cNvPr id="6" name="삽화:설비_유압파워팩.svg" descr="illust_7807211521642529080_1793113376.png"/>
           <p:cNvPicPr>
             <a:picLocks noChangeAspect="1"/>
           </p:cNvPicPr>
@@ -37957,7 +38094,7 @@
       </p:sp>
       <p:pic>
         <p:nvPicPr>
-          <p:cNvPr id="6" name="삽화:데이터_명령_두경로.svg" descr="illust_3642508624154387782_1793113376.png"/>
+          <p:cNvPr id="6" name="삽화:데이터_명령_두경로.svg" descr="illust_8878611698172230270_1793113376.png"/>
           <p:cNvPicPr>
             <a:picLocks noChangeAspect="1"/>
           </p:cNvPicPr>
